--- a/AIA_Architecte_Intelligence_Artificielle/Bloc_3_Pipeline_IA/Presentation/Architecture_Fraud_Detection.pptx
+++ b/AIA_Architecte_Intelligence_Artificielle/Bloc_3_Pipeline_IA/Presentation/Architecture_Fraud_Detection.pptx
@@ -6,6 +6,7 @@
   </p:sldMasterIdLst>
   <p:sldIdLst>
     <p:sldId id="256" r:id="rId2"/>
+    <p:sldId id="257" r:id="rId3"/>
   </p:sldIdLst>
   <p:sldSz cx="12192000" cy="6858000"/>
   <p:notesSz cx="6858000" cy="9144000"/>
@@ -104,6 +105,11 @@
       </a:defRPr>
     </a:lvl9pPr>
   </p:defaultTextStyle>
+  <p:extLst>
+    <p:ext uri="{EFAFB233-063F-42B5-8137-9DF3F51BA10A}">
+      <p15:sldGuideLst xmlns:p15="http://schemas.microsoft.com/office/powerpoint/2012/main"/>
+    </p:ext>
+  </p:extLst>
 </p:presentation>
 </file>
 
@@ -254,7 +260,7 @@
           <a:p>
             <a:fld id="{1B006B2C-3CAE-4EA5-9F5D-D2B76FE68327}" type="datetimeFigureOut">
               <a:rPr lang="fr-FR" smtClean="0"/>
-              <a:t>18/05/2025</a:t>
+              <a:t>19/05/2025</a:t>
             </a:fld>
             <a:endParaRPr lang="fr-FR"/>
           </a:p>
@@ -452,7 +458,7 @@
           <a:p>
             <a:fld id="{1B006B2C-3CAE-4EA5-9F5D-D2B76FE68327}" type="datetimeFigureOut">
               <a:rPr lang="fr-FR" smtClean="0"/>
-              <a:t>18/05/2025</a:t>
+              <a:t>19/05/2025</a:t>
             </a:fld>
             <a:endParaRPr lang="fr-FR"/>
           </a:p>
@@ -660,7 +666,7 @@
           <a:p>
             <a:fld id="{1B006B2C-3CAE-4EA5-9F5D-D2B76FE68327}" type="datetimeFigureOut">
               <a:rPr lang="fr-FR" smtClean="0"/>
-              <a:t>18/05/2025</a:t>
+              <a:t>19/05/2025</a:t>
             </a:fld>
             <a:endParaRPr lang="fr-FR"/>
           </a:p>
@@ -858,7 +864,7 @@
           <a:p>
             <a:fld id="{1B006B2C-3CAE-4EA5-9F5D-D2B76FE68327}" type="datetimeFigureOut">
               <a:rPr lang="fr-FR" smtClean="0"/>
-              <a:t>18/05/2025</a:t>
+              <a:t>19/05/2025</a:t>
             </a:fld>
             <a:endParaRPr lang="fr-FR"/>
           </a:p>
@@ -1133,7 +1139,7 @@
           <a:p>
             <a:fld id="{1B006B2C-3CAE-4EA5-9F5D-D2B76FE68327}" type="datetimeFigureOut">
               <a:rPr lang="fr-FR" smtClean="0"/>
-              <a:t>18/05/2025</a:t>
+              <a:t>19/05/2025</a:t>
             </a:fld>
             <a:endParaRPr lang="fr-FR"/>
           </a:p>
@@ -1398,7 +1404,7 @@
           <a:p>
             <a:fld id="{1B006B2C-3CAE-4EA5-9F5D-D2B76FE68327}" type="datetimeFigureOut">
               <a:rPr lang="fr-FR" smtClean="0"/>
-              <a:t>18/05/2025</a:t>
+              <a:t>19/05/2025</a:t>
             </a:fld>
             <a:endParaRPr lang="fr-FR"/>
           </a:p>
@@ -1810,7 +1816,7 @@
           <a:p>
             <a:fld id="{1B006B2C-3CAE-4EA5-9F5D-D2B76FE68327}" type="datetimeFigureOut">
               <a:rPr lang="fr-FR" smtClean="0"/>
-              <a:t>18/05/2025</a:t>
+              <a:t>19/05/2025</a:t>
             </a:fld>
             <a:endParaRPr lang="fr-FR"/>
           </a:p>
@@ -1951,7 +1957,7 @@
           <a:p>
             <a:fld id="{1B006B2C-3CAE-4EA5-9F5D-D2B76FE68327}" type="datetimeFigureOut">
               <a:rPr lang="fr-FR" smtClean="0"/>
-              <a:t>18/05/2025</a:t>
+              <a:t>19/05/2025</a:t>
             </a:fld>
             <a:endParaRPr lang="fr-FR"/>
           </a:p>
@@ -2064,7 +2070,7 @@
           <a:p>
             <a:fld id="{1B006B2C-3CAE-4EA5-9F5D-D2B76FE68327}" type="datetimeFigureOut">
               <a:rPr lang="fr-FR" smtClean="0"/>
-              <a:t>18/05/2025</a:t>
+              <a:t>19/05/2025</a:t>
             </a:fld>
             <a:endParaRPr lang="fr-FR"/>
           </a:p>
@@ -2375,7 +2381,7 @@
           <a:p>
             <a:fld id="{1B006B2C-3CAE-4EA5-9F5D-D2B76FE68327}" type="datetimeFigureOut">
               <a:rPr lang="fr-FR" smtClean="0"/>
-              <a:t>18/05/2025</a:t>
+              <a:t>19/05/2025</a:t>
             </a:fld>
             <a:endParaRPr lang="fr-FR"/>
           </a:p>
@@ -2663,7 +2669,7 @@
           <a:p>
             <a:fld id="{1B006B2C-3CAE-4EA5-9F5D-D2B76FE68327}" type="datetimeFigureOut">
               <a:rPr lang="fr-FR" smtClean="0"/>
-              <a:t>18/05/2025</a:t>
+              <a:t>19/05/2025</a:t>
             </a:fld>
             <a:endParaRPr lang="fr-FR"/>
           </a:p>
@@ -2904,7 +2910,7 @@
           <a:p>
             <a:fld id="{1B006B2C-3CAE-4EA5-9F5D-D2B76FE68327}" type="datetimeFigureOut">
               <a:rPr lang="fr-FR" smtClean="0"/>
-              <a:t>18/05/2025</a:t>
+              <a:t>19/05/2025</a:t>
             </a:fld>
             <a:endParaRPr lang="fr-FR"/>
           </a:p>
@@ -5174,6 +5180,1110 @@
     <p:extLst>
       <p:ext uri="{BB962C8B-B14F-4D97-AF65-F5344CB8AC3E}">
         <p14:creationId xmlns:p14="http://schemas.microsoft.com/office/powerpoint/2010/main" val="845024350"/>
+      </p:ext>
+    </p:extLst>
+  </p:cSld>
+  <p:clrMapOvr>
+    <a:masterClrMapping/>
+  </p:clrMapOvr>
+</p:sld>
+</file>
+
+<file path=ppt/slides/slide2.xml><?xml version="1.0" encoding="utf-8"?>
+<p:sld xmlns:a="http://schemas.openxmlformats.org/drawingml/2006/main" xmlns:r="http://schemas.openxmlformats.org/officeDocument/2006/relationships" xmlns:p="http://schemas.openxmlformats.org/presentationml/2006/main">
+  <p:cSld>
+    <p:spTree>
+      <p:nvGrpSpPr>
+        <p:cNvPr id="1" name=""/>
+        <p:cNvGrpSpPr/>
+        <p:nvPr/>
+      </p:nvGrpSpPr>
+      <p:grpSpPr>
+        <a:xfrm>
+          <a:off x="0" y="0"/>
+          <a:ext cx="0" cy="0"/>
+          <a:chOff x="0" y="0"/>
+          <a:chExt cx="0" cy="0"/>
+        </a:xfrm>
+      </p:grpSpPr>
+      <p:sp>
+        <p:nvSpPr>
+          <p:cNvPr id="24" name="Ellipse 23">
+            <a:extLst>
+              <a:ext uri="{FF2B5EF4-FFF2-40B4-BE49-F238E27FC236}">
+                <a16:creationId xmlns:a16="http://schemas.microsoft.com/office/drawing/2014/main" id="{FBBF0187-3782-DD68-6886-37CAA740B228}"/>
+              </a:ext>
+            </a:extLst>
+          </p:cNvPr>
+          <p:cNvSpPr/>
+          <p:nvPr/>
+        </p:nvSpPr>
+        <p:spPr>
+          <a:xfrm>
+            <a:off x="4743272" y="2167834"/>
+            <a:ext cx="2927931" cy="2544900"/>
+          </a:xfrm>
+          <a:prstGeom prst="ellipse">
+            <a:avLst/>
+          </a:prstGeom>
+          <a:solidFill>
+            <a:schemeClr val="bg2">
+              <a:lumMod val="90000"/>
+            </a:schemeClr>
+          </a:solidFill>
+        </p:spPr>
+        <p:style>
+          <a:lnRef idx="2">
+            <a:schemeClr val="accent1">
+              <a:shade val="15000"/>
+            </a:schemeClr>
+          </a:lnRef>
+          <a:fillRef idx="1">
+            <a:schemeClr val="accent1"/>
+          </a:fillRef>
+          <a:effectRef idx="0">
+            <a:schemeClr val="accent1"/>
+          </a:effectRef>
+          <a:fontRef idx="minor">
+            <a:schemeClr val="lt1"/>
+          </a:fontRef>
+        </p:style>
+        <p:txBody>
+          <a:bodyPr rtlCol="0" anchor="ctr"/>
+          <a:lstStyle/>
+          <a:p>
+            <a:pPr algn="ctr"/>
+            <a:endParaRPr lang="fr-FR"/>
+          </a:p>
+        </p:txBody>
+      </p:sp>
+      <p:pic>
+        <p:nvPicPr>
+          <p:cNvPr id="1026" name="Picture 2">
+            <a:extLst>
+              <a:ext uri="{FF2B5EF4-FFF2-40B4-BE49-F238E27FC236}">
+                <a16:creationId xmlns:a16="http://schemas.microsoft.com/office/drawing/2014/main" id="{D1FCF6BC-7BFB-AD24-A4E0-CE84C4A3A2F8}"/>
+              </a:ext>
+            </a:extLst>
+          </p:cNvPr>
+          <p:cNvPicPr>
+            <a:picLocks noChangeAspect="1" noChangeArrowheads="1"/>
+          </p:cNvPicPr>
+          <p:nvPr/>
+        </p:nvPicPr>
+        <p:blipFill>
+          <a:blip r:embed="rId2">
+            <a:extLst>
+              <a:ext uri="{28A0092B-C50C-407E-A947-70E740481C1C}">
+                <a14:useLocalDpi xmlns:a14="http://schemas.microsoft.com/office/drawing/2010/main" val="0"/>
+              </a:ext>
+            </a:extLst>
+          </a:blip>
+          <a:srcRect/>
+          <a:stretch>
+            <a:fillRect/>
+          </a:stretch>
+        </p:blipFill>
+        <p:spPr bwMode="auto">
+          <a:xfrm>
+            <a:off x="5349628" y="2762932"/>
+            <a:ext cx="1898666" cy="734151"/>
+          </a:xfrm>
+          <a:prstGeom prst="rect">
+            <a:avLst/>
+          </a:prstGeom>
+          <a:noFill/>
+          <a:extLst>
+            <a:ext uri="{909E8E84-426E-40DD-AFC4-6F175D3DCCD1}">
+              <a14:hiddenFill xmlns:a14="http://schemas.microsoft.com/office/drawing/2010/main">
+                <a:solidFill>
+                  <a:srgbClr val="FFFFFF"/>
+                </a:solidFill>
+              </a14:hiddenFill>
+            </a:ext>
+          </a:extLst>
+        </p:spPr>
+      </p:pic>
+      <p:pic>
+        <p:nvPicPr>
+          <p:cNvPr id="1028" name="Picture 4" descr="Why we Invested in Neon - M12">
+            <a:extLst>
+              <a:ext uri="{FF2B5EF4-FFF2-40B4-BE49-F238E27FC236}">
+                <a16:creationId xmlns:a16="http://schemas.microsoft.com/office/drawing/2014/main" id="{FC354FBA-6247-189D-8F65-B7CFD3D64DEE}"/>
+              </a:ext>
+            </a:extLst>
+          </p:cNvPr>
+          <p:cNvPicPr>
+            <a:picLocks noChangeAspect="1" noChangeArrowheads="1"/>
+          </p:cNvPicPr>
+          <p:nvPr/>
+        </p:nvPicPr>
+        <p:blipFill>
+          <a:blip r:embed="rId3">
+            <a:extLst>
+              <a:ext uri="{28A0092B-C50C-407E-A947-70E740481C1C}">
+                <a14:useLocalDpi xmlns:a14="http://schemas.microsoft.com/office/drawing/2010/main" val="0"/>
+              </a:ext>
+            </a:extLst>
+          </a:blip>
+          <a:srcRect/>
+          <a:stretch>
+            <a:fillRect/>
+          </a:stretch>
+        </p:blipFill>
+        <p:spPr bwMode="auto">
+          <a:xfrm>
+            <a:off x="8684227" y="5156267"/>
+            <a:ext cx="1165278" cy="494078"/>
+          </a:xfrm>
+          <a:prstGeom prst="rect">
+            <a:avLst/>
+          </a:prstGeom>
+          <a:noFill/>
+          <a:extLst>
+            <a:ext uri="{909E8E84-426E-40DD-AFC4-6F175D3DCCD1}">
+              <a14:hiddenFill xmlns:a14="http://schemas.microsoft.com/office/drawing/2010/main">
+                <a:solidFill>
+                  <a:srgbClr val="FFFFFF"/>
+                </a:solidFill>
+              </a14:hiddenFill>
+            </a:ext>
+          </a:extLst>
+        </p:spPr>
+      </p:pic>
+      <p:pic>
+        <p:nvPicPr>
+          <p:cNvPr id="1030" name="Picture 6" descr="Api - Icônes ui gratuites">
+            <a:extLst>
+              <a:ext uri="{FF2B5EF4-FFF2-40B4-BE49-F238E27FC236}">
+                <a16:creationId xmlns:a16="http://schemas.microsoft.com/office/drawing/2014/main" id="{E0729101-BC7F-6237-F3B9-6B817300EFCA}"/>
+              </a:ext>
+            </a:extLst>
+          </p:cNvPr>
+          <p:cNvPicPr>
+            <a:picLocks noChangeAspect="1" noChangeArrowheads="1"/>
+          </p:cNvPicPr>
+          <p:nvPr/>
+        </p:nvPicPr>
+        <p:blipFill>
+          <a:blip r:embed="rId4">
+            <a:extLst>
+              <a:ext uri="{28A0092B-C50C-407E-A947-70E740481C1C}">
+                <a14:useLocalDpi xmlns:a14="http://schemas.microsoft.com/office/drawing/2010/main" val="0"/>
+              </a:ext>
+            </a:extLst>
+          </a:blip>
+          <a:srcRect/>
+          <a:stretch>
+            <a:fillRect/>
+          </a:stretch>
+        </p:blipFill>
+        <p:spPr bwMode="auto">
+          <a:xfrm>
+            <a:off x="2834862" y="1200737"/>
+            <a:ext cx="986115" cy="986115"/>
+          </a:xfrm>
+          <a:prstGeom prst="rect">
+            <a:avLst/>
+          </a:prstGeom>
+          <a:noFill/>
+          <a:extLst>
+            <a:ext uri="{909E8E84-426E-40DD-AFC4-6F175D3DCCD1}">
+              <a14:hiddenFill xmlns:a14="http://schemas.microsoft.com/office/drawing/2010/main">
+                <a:solidFill>
+                  <a:srgbClr val="FFFFFF"/>
+                </a:solidFill>
+              </a14:hiddenFill>
+            </a:ext>
+          </a:extLst>
+        </p:spPr>
+      </p:pic>
+      <p:pic>
+        <p:nvPicPr>
+          <p:cNvPr id="1048" name="Picture 24">
+            <a:extLst>
+              <a:ext uri="{FF2B5EF4-FFF2-40B4-BE49-F238E27FC236}">
+                <a16:creationId xmlns:a16="http://schemas.microsoft.com/office/drawing/2014/main" id="{679386F7-740E-1933-9FD7-25B4ED255601}"/>
+              </a:ext>
+            </a:extLst>
+          </p:cNvPr>
+          <p:cNvPicPr>
+            <a:picLocks noChangeAspect="1" noChangeArrowheads="1"/>
+          </p:cNvPicPr>
+          <p:nvPr/>
+        </p:nvPicPr>
+        <p:blipFill>
+          <a:blip r:embed="rId5">
+            <a:extLst>
+              <a:ext uri="{28A0092B-C50C-407E-A947-70E740481C1C}">
+                <a14:useLocalDpi xmlns:a14="http://schemas.microsoft.com/office/drawing/2010/main" val="0"/>
+              </a:ext>
+            </a:extLst>
+          </a:blip>
+          <a:srcRect/>
+          <a:stretch>
+            <a:fillRect/>
+          </a:stretch>
+        </p:blipFill>
+        <p:spPr bwMode="auto">
+          <a:xfrm>
+            <a:off x="10510078" y="2034513"/>
+            <a:ext cx="1250236" cy="731388"/>
+          </a:xfrm>
+          <a:prstGeom prst="rect">
+            <a:avLst/>
+          </a:prstGeom>
+          <a:noFill/>
+          <a:extLst>
+            <a:ext uri="{909E8E84-426E-40DD-AFC4-6F175D3DCCD1}">
+              <a14:hiddenFill xmlns:a14="http://schemas.microsoft.com/office/drawing/2010/main">
+                <a:solidFill>
+                  <a:srgbClr val="FFFFFF"/>
+                </a:solidFill>
+              </a14:hiddenFill>
+            </a:ext>
+          </a:extLst>
+        </p:spPr>
+      </p:pic>
+      <p:sp>
+        <p:nvSpPr>
+          <p:cNvPr id="5" name="ZoneTexte 4">
+            <a:extLst>
+              <a:ext uri="{FF2B5EF4-FFF2-40B4-BE49-F238E27FC236}">
+                <a16:creationId xmlns:a16="http://schemas.microsoft.com/office/drawing/2014/main" id="{A43DF3AC-3FC9-298E-2F4F-D19454F9CB1D}"/>
+              </a:ext>
+            </a:extLst>
+          </p:cNvPr>
+          <p:cNvSpPr txBox="1"/>
+          <p:nvPr/>
+        </p:nvSpPr>
+        <p:spPr>
+          <a:xfrm>
+            <a:off x="79769" y="1442362"/>
+            <a:ext cx="2446235" cy="261610"/>
+          </a:xfrm>
+          <a:prstGeom prst="rect">
+            <a:avLst/>
+          </a:prstGeom>
+          <a:noFill/>
+        </p:spPr>
+        <p:txBody>
+          <a:bodyPr wrap="square" rtlCol="0">
+            <a:spAutoFit/>
+          </a:bodyPr>
+          <a:lstStyle/>
+          <a:p>
+            <a:r>
+              <a:rPr lang="fr-FR" sz="1100" b="1" i="1" dirty="0" err="1"/>
+              <a:t>History</a:t>
+            </a:r>
+            <a:r>
+              <a:rPr lang="fr-FR" sz="1100" b="1" i="1" dirty="0"/>
+              <a:t> </a:t>
+            </a:r>
+            <a:r>
+              <a:rPr lang="fr-FR" sz="1100" b="1" i="1" dirty="0" err="1"/>
+              <a:t>database</a:t>
+            </a:r>
+            <a:endParaRPr lang="fr-FR" sz="1100" b="1" i="1" dirty="0"/>
+          </a:p>
+        </p:txBody>
+      </p:sp>
+      <p:sp>
+        <p:nvSpPr>
+          <p:cNvPr id="6" name="ZoneTexte 5">
+            <a:extLst>
+              <a:ext uri="{FF2B5EF4-FFF2-40B4-BE49-F238E27FC236}">
+                <a16:creationId xmlns:a16="http://schemas.microsoft.com/office/drawing/2014/main" id="{B2FE09CD-C582-E190-90D9-2C79F0C8B316}"/>
+              </a:ext>
+            </a:extLst>
+          </p:cNvPr>
+          <p:cNvSpPr txBox="1"/>
+          <p:nvPr/>
+        </p:nvSpPr>
+        <p:spPr>
+          <a:xfrm>
+            <a:off x="2631879" y="837914"/>
+            <a:ext cx="2446235" cy="261610"/>
+          </a:xfrm>
+          <a:prstGeom prst="rect">
+            <a:avLst/>
+          </a:prstGeom>
+          <a:noFill/>
+        </p:spPr>
+        <p:txBody>
+          <a:bodyPr wrap="square" rtlCol="0">
+            <a:spAutoFit/>
+          </a:bodyPr>
+          <a:lstStyle/>
+          <a:p>
+            <a:r>
+              <a:rPr lang="fr-FR" sz="1100" b="1" i="1" dirty="0"/>
+              <a:t>Live </a:t>
+            </a:r>
+            <a:r>
+              <a:rPr lang="fr-FR" sz="1100" b="1" i="1" dirty="0" err="1"/>
+              <a:t>Youtube</a:t>
+            </a:r>
+            <a:r>
+              <a:rPr lang="fr-FR" sz="1100" b="1" i="1" dirty="0"/>
+              <a:t> or Twitch streaming</a:t>
+            </a:r>
+          </a:p>
+        </p:txBody>
+      </p:sp>
+      <p:pic>
+        <p:nvPicPr>
+          <p:cNvPr id="1056" name="Picture 32" descr="Database Icons - Free SVG &amp; PNG Database Images - Noun Project">
+            <a:extLst>
+              <a:ext uri="{FF2B5EF4-FFF2-40B4-BE49-F238E27FC236}">
+                <a16:creationId xmlns:a16="http://schemas.microsoft.com/office/drawing/2014/main" id="{1047CF3E-64AA-B9F0-EF27-25DDCD54CFBA}"/>
+              </a:ext>
+            </a:extLst>
+          </p:cNvPr>
+          <p:cNvPicPr>
+            <a:picLocks noChangeAspect="1" noChangeArrowheads="1"/>
+          </p:cNvPicPr>
+          <p:nvPr/>
+        </p:nvPicPr>
+        <p:blipFill>
+          <a:blip r:embed="rId6">
+            <a:extLst>
+              <a:ext uri="{28A0092B-C50C-407E-A947-70E740481C1C}">
+                <a14:useLocalDpi xmlns:a14="http://schemas.microsoft.com/office/drawing/2010/main" val="0"/>
+              </a:ext>
+            </a:extLst>
+          </a:blip>
+          <a:srcRect/>
+          <a:stretch>
+            <a:fillRect/>
+          </a:stretch>
+        </p:blipFill>
+        <p:spPr bwMode="auto">
+          <a:xfrm>
+            <a:off x="423879" y="1771487"/>
+            <a:ext cx="986116" cy="986116"/>
+          </a:xfrm>
+          <a:prstGeom prst="rect">
+            <a:avLst/>
+          </a:prstGeom>
+          <a:noFill/>
+          <a:extLst>
+            <a:ext uri="{909E8E84-426E-40DD-AFC4-6F175D3DCCD1}">
+              <a14:hiddenFill xmlns:a14="http://schemas.microsoft.com/office/drawing/2010/main">
+                <a:solidFill>
+                  <a:srgbClr val="FFFFFF"/>
+                </a:solidFill>
+              </a14:hiddenFill>
+            </a:ext>
+          </a:extLst>
+        </p:spPr>
+      </p:pic>
+      <p:pic>
+        <p:nvPicPr>
+          <p:cNvPr id="1064" name="Picture 40" descr="Machine Learning Icon - Free Download Science &amp; Technology Icons | IconScout">
+            <a:extLst>
+              <a:ext uri="{FF2B5EF4-FFF2-40B4-BE49-F238E27FC236}">
+                <a16:creationId xmlns:a16="http://schemas.microsoft.com/office/drawing/2014/main" id="{C85F6B9E-E947-982A-3B3C-D874575A35C6}"/>
+              </a:ext>
+            </a:extLst>
+          </p:cNvPr>
+          <p:cNvPicPr>
+            <a:picLocks noChangeAspect="1" noChangeArrowheads="1"/>
+          </p:cNvPicPr>
+          <p:nvPr/>
+        </p:nvPicPr>
+        <p:blipFill>
+          <a:blip r:embed="rId7">
+            <a:extLst>
+              <a:ext uri="{28A0092B-C50C-407E-A947-70E740481C1C}">
+                <a14:useLocalDpi xmlns:a14="http://schemas.microsoft.com/office/drawing/2010/main" val="0"/>
+              </a:ext>
+            </a:extLst>
+          </a:blip>
+          <a:srcRect/>
+          <a:stretch>
+            <a:fillRect/>
+          </a:stretch>
+        </p:blipFill>
+        <p:spPr bwMode="auto">
+          <a:xfrm>
+            <a:off x="-5460947" y="4217717"/>
+            <a:ext cx="137352" cy="137352"/>
+          </a:xfrm>
+          <a:prstGeom prst="rect">
+            <a:avLst/>
+          </a:prstGeom>
+          <a:noFill/>
+          <a:extLst>
+            <a:ext uri="{909E8E84-426E-40DD-AFC4-6F175D3DCCD1}">
+              <a14:hiddenFill xmlns:a14="http://schemas.microsoft.com/office/drawing/2010/main">
+                <a:solidFill>
+                  <a:srgbClr val="FFFFFF"/>
+                </a:solidFill>
+              </a14:hiddenFill>
+            </a:ext>
+          </a:extLst>
+        </p:spPr>
+      </p:pic>
+      <p:pic>
+        <p:nvPicPr>
+          <p:cNvPr id="1068" name="Picture 44" descr="Python logo - Icônes Médias sociaux et logos">
+            <a:extLst>
+              <a:ext uri="{FF2B5EF4-FFF2-40B4-BE49-F238E27FC236}">
+                <a16:creationId xmlns:a16="http://schemas.microsoft.com/office/drawing/2014/main" id="{787C8B72-916D-2ABF-0357-C8B810077001}"/>
+              </a:ext>
+            </a:extLst>
+          </p:cNvPr>
+          <p:cNvPicPr>
+            <a:picLocks noChangeAspect="1" noChangeArrowheads="1"/>
+          </p:cNvPicPr>
+          <p:nvPr/>
+        </p:nvPicPr>
+        <p:blipFill>
+          <a:blip r:embed="rId8">
+            <a:extLst>
+              <a:ext uri="{28A0092B-C50C-407E-A947-70E740481C1C}">
+                <a14:useLocalDpi xmlns:a14="http://schemas.microsoft.com/office/drawing/2010/main" val="0"/>
+              </a:ext>
+            </a:extLst>
+          </a:blip>
+          <a:srcRect/>
+          <a:stretch>
+            <a:fillRect/>
+          </a:stretch>
+        </p:blipFill>
+        <p:spPr bwMode="auto">
+          <a:xfrm>
+            <a:off x="6025048" y="3698960"/>
+            <a:ext cx="463647" cy="463647"/>
+          </a:xfrm>
+          <a:prstGeom prst="rect">
+            <a:avLst/>
+          </a:prstGeom>
+          <a:noFill/>
+          <a:extLst>
+            <a:ext uri="{909E8E84-426E-40DD-AFC4-6F175D3DCCD1}">
+              <a14:hiddenFill xmlns:a14="http://schemas.microsoft.com/office/drawing/2010/main">
+                <a:solidFill>
+                  <a:srgbClr val="FFFFFF"/>
+                </a:solidFill>
+              </a14:hiddenFill>
+            </a:ext>
+          </a:extLst>
+        </p:spPr>
+      </p:pic>
+      <p:pic>
+        <p:nvPicPr>
+          <p:cNvPr id="1070" name="Picture 46" descr="Machine learning model&quot; Icon - Download for free – Iconduck">
+            <a:extLst>
+              <a:ext uri="{FF2B5EF4-FFF2-40B4-BE49-F238E27FC236}">
+                <a16:creationId xmlns:a16="http://schemas.microsoft.com/office/drawing/2014/main" id="{ADE9EFAB-9C79-0FE8-5A99-DADA44CC5F0D}"/>
+              </a:ext>
+            </a:extLst>
+          </p:cNvPr>
+          <p:cNvPicPr>
+            <a:picLocks noChangeAspect="1" noChangeArrowheads="1"/>
+          </p:cNvPicPr>
+          <p:nvPr/>
+        </p:nvPicPr>
+        <p:blipFill>
+          <a:blip r:embed="rId9">
+            <a:extLst>
+              <a:ext uri="{28A0092B-C50C-407E-A947-70E740481C1C}">
+                <a14:useLocalDpi xmlns:a14="http://schemas.microsoft.com/office/drawing/2010/main" val="0"/>
+              </a:ext>
+            </a:extLst>
+          </a:blip>
+          <a:srcRect/>
+          <a:stretch>
+            <a:fillRect/>
+          </a:stretch>
+        </p:blipFill>
+        <p:spPr bwMode="auto">
+          <a:xfrm>
+            <a:off x="3441705" y="5459512"/>
+            <a:ext cx="621686" cy="621686"/>
+          </a:xfrm>
+          <a:prstGeom prst="rect">
+            <a:avLst/>
+          </a:prstGeom>
+          <a:noFill/>
+          <a:extLst>
+            <a:ext uri="{909E8E84-426E-40DD-AFC4-6F175D3DCCD1}">
+              <a14:hiddenFill xmlns:a14="http://schemas.microsoft.com/office/drawing/2010/main">
+                <a:solidFill>
+                  <a:srgbClr val="FFFFFF"/>
+                </a:solidFill>
+              </a14:hiddenFill>
+            </a:ext>
+          </a:extLst>
+        </p:spPr>
+      </p:pic>
+      <p:pic>
+        <p:nvPicPr>
+          <p:cNvPr id="1076" name="Picture 52">
+            <a:extLst>
+              <a:ext uri="{FF2B5EF4-FFF2-40B4-BE49-F238E27FC236}">
+                <a16:creationId xmlns:a16="http://schemas.microsoft.com/office/drawing/2014/main" id="{D3E5469D-F32C-8BE8-F13F-002C04768376}"/>
+              </a:ext>
+            </a:extLst>
+          </p:cNvPr>
+          <p:cNvPicPr>
+            <a:picLocks noChangeAspect="1" noChangeArrowheads="1"/>
+          </p:cNvPicPr>
+          <p:nvPr/>
+        </p:nvPicPr>
+        <p:blipFill>
+          <a:blip r:embed="rId10">
+            <a:extLst>
+              <a:ext uri="{28A0092B-C50C-407E-A947-70E740481C1C}">
+                <a14:useLocalDpi xmlns:a14="http://schemas.microsoft.com/office/drawing/2010/main" val="0"/>
+              </a:ext>
+            </a:extLst>
+          </a:blip>
+          <a:srcRect/>
+          <a:stretch>
+            <a:fillRect/>
+          </a:stretch>
+        </p:blipFill>
+        <p:spPr bwMode="auto">
+          <a:xfrm>
+            <a:off x="7044865" y="5015244"/>
+            <a:ext cx="817841" cy="978352"/>
+          </a:xfrm>
+          <a:prstGeom prst="rect">
+            <a:avLst/>
+          </a:prstGeom>
+          <a:noFill/>
+          <a:extLst>
+            <a:ext uri="{909E8E84-426E-40DD-AFC4-6F175D3DCCD1}">
+              <a14:hiddenFill xmlns:a14="http://schemas.microsoft.com/office/drawing/2010/main">
+                <a:solidFill>
+                  <a:srgbClr val="FFFFFF"/>
+                </a:solidFill>
+              </a14:hiddenFill>
+            </a:ext>
+          </a:extLst>
+        </p:spPr>
+      </p:pic>
+      <p:cxnSp>
+        <p:nvCxnSpPr>
+          <p:cNvPr id="40" name="Connecteur droit avec flèche 39">
+            <a:extLst>
+              <a:ext uri="{FF2B5EF4-FFF2-40B4-BE49-F238E27FC236}">
+                <a16:creationId xmlns:a16="http://schemas.microsoft.com/office/drawing/2014/main" id="{04F2E30A-197C-C8FF-1779-FF4BFA75C4F5}"/>
+              </a:ext>
+            </a:extLst>
+          </p:cNvPr>
+          <p:cNvCxnSpPr>
+            <a:cxnSpLocks/>
+          </p:cNvCxnSpPr>
+          <p:nvPr/>
+        </p:nvCxnSpPr>
+        <p:spPr>
+          <a:xfrm>
+            <a:off x="3936745" y="1881438"/>
+            <a:ext cx="948717" cy="817011"/>
+          </a:xfrm>
+          <a:prstGeom prst="straightConnector1">
+            <a:avLst/>
+          </a:prstGeom>
+          <a:ln>
+            <a:tailEnd type="triangle"/>
+          </a:ln>
+        </p:spPr>
+        <p:style>
+          <a:lnRef idx="2">
+            <a:schemeClr val="accent1"/>
+          </a:lnRef>
+          <a:fillRef idx="0">
+            <a:schemeClr val="accent1"/>
+          </a:fillRef>
+          <a:effectRef idx="1">
+            <a:schemeClr val="accent1"/>
+          </a:effectRef>
+          <a:fontRef idx="minor">
+            <a:schemeClr val="tx1"/>
+          </a:fontRef>
+        </p:style>
+      </p:cxnSp>
+      <p:cxnSp>
+        <p:nvCxnSpPr>
+          <p:cNvPr id="41" name="Connecteur droit avec flèche 40">
+            <a:extLst>
+              <a:ext uri="{FF2B5EF4-FFF2-40B4-BE49-F238E27FC236}">
+                <a16:creationId xmlns:a16="http://schemas.microsoft.com/office/drawing/2014/main" id="{9FD35E68-3A49-6DEB-A70D-3AC4DBD1C5F9}"/>
+              </a:ext>
+            </a:extLst>
+          </p:cNvPr>
+          <p:cNvCxnSpPr>
+            <a:cxnSpLocks/>
+          </p:cNvCxnSpPr>
+          <p:nvPr/>
+        </p:nvCxnSpPr>
+        <p:spPr>
+          <a:xfrm>
+            <a:off x="1245140" y="2698449"/>
+            <a:ext cx="1516204" cy="1422531"/>
+          </a:xfrm>
+          <a:prstGeom prst="straightConnector1">
+            <a:avLst/>
+          </a:prstGeom>
+          <a:ln>
+            <a:tailEnd type="triangle"/>
+          </a:ln>
+        </p:spPr>
+        <p:style>
+          <a:lnRef idx="2">
+            <a:schemeClr val="accent1"/>
+          </a:lnRef>
+          <a:fillRef idx="0">
+            <a:schemeClr val="accent1"/>
+          </a:fillRef>
+          <a:effectRef idx="1">
+            <a:schemeClr val="accent1"/>
+          </a:effectRef>
+          <a:fontRef idx="minor">
+            <a:schemeClr val="tx1"/>
+          </a:fontRef>
+        </p:style>
+      </p:cxnSp>
+      <p:cxnSp>
+        <p:nvCxnSpPr>
+          <p:cNvPr id="43" name="Connecteur droit avec flèche 42">
+            <a:extLst>
+              <a:ext uri="{FF2B5EF4-FFF2-40B4-BE49-F238E27FC236}">
+                <a16:creationId xmlns:a16="http://schemas.microsoft.com/office/drawing/2014/main" id="{38B47C95-B0C3-22A2-F990-10176E5ABF06}"/>
+              </a:ext>
+            </a:extLst>
+          </p:cNvPr>
+          <p:cNvCxnSpPr>
+            <a:cxnSpLocks/>
+          </p:cNvCxnSpPr>
+          <p:nvPr/>
+        </p:nvCxnSpPr>
+        <p:spPr>
+          <a:xfrm>
+            <a:off x="5045533" y="5148274"/>
+            <a:ext cx="1931412" cy="311238"/>
+          </a:xfrm>
+          <a:prstGeom prst="straightConnector1">
+            <a:avLst/>
+          </a:prstGeom>
+          <a:ln>
+            <a:tailEnd type="triangle"/>
+          </a:ln>
+        </p:spPr>
+        <p:style>
+          <a:lnRef idx="2">
+            <a:schemeClr val="accent1"/>
+          </a:lnRef>
+          <a:fillRef idx="0">
+            <a:schemeClr val="accent1"/>
+          </a:fillRef>
+          <a:effectRef idx="1">
+            <a:schemeClr val="accent1"/>
+          </a:effectRef>
+          <a:fontRef idx="minor">
+            <a:schemeClr val="tx1"/>
+          </a:fontRef>
+        </p:style>
+      </p:cxnSp>
+      <p:cxnSp>
+        <p:nvCxnSpPr>
+          <p:cNvPr id="45" name="Connecteur droit avec flèche 44">
+            <a:extLst>
+              <a:ext uri="{FF2B5EF4-FFF2-40B4-BE49-F238E27FC236}">
+                <a16:creationId xmlns:a16="http://schemas.microsoft.com/office/drawing/2014/main" id="{25E08704-2F4C-EA8A-CCCD-C82911362BFD}"/>
+              </a:ext>
+            </a:extLst>
+          </p:cNvPr>
+          <p:cNvCxnSpPr>
+            <a:cxnSpLocks/>
+          </p:cNvCxnSpPr>
+          <p:nvPr/>
+        </p:nvCxnSpPr>
+        <p:spPr>
+          <a:xfrm>
+            <a:off x="6923371" y="4681221"/>
+            <a:ext cx="229538" cy="310345"/>
+          </a:xfrm>
+          <a:prstGeom prst="straightConnector1">
+            <a:avLst/>
+          </a:prstGeom>
+          <a:ln>
+            <a:tailEnd type="triangle"/>
+          </a:ln>
+        </p:spPr>
+        <p:style>
+          <a:lnRef idx="2">
+            <a:schemeClr val="accent1"/>
+          </a:lnRef>
+          <a:fillRef idx="0">
+            <a:schemeClr val="accent1"/>
+          </a:fillRef>
+          <a:effectRef idx="1">
+            <a:schemeClr val="accent1"/>
+          </a:effectRef>
+          <a:fontRef idx="minor">
+            <a:schemeClr val="tx1"/>
+          </a:fontRef>
+        </p:style>
+      </p:cxnSp>
+      <p:cxnSp>
+        <p:nvCxnSpPr>
+          <p:cNvPr id="49" name="Connecteur droit avec flèche 48">
+            <a:extLst>
+              <a:ext uri="{FF2B5EF4-FFF2-40B4-BE49-F238E27FC236}">
+                <a16:creationId xmlns:a16="http://schemas.microsoft.com/office/drawing/2014/main" id="{808740E2-D960-5D5E-DCFB-792FD4E0D93D}"/>
+              </a:ext>
+            </a:extLst>
+          </p:cNvPr>
+          <p:cNvCxnSpPr>
+            <a:cxnSpLocks/>
+          </p:cNvCxnSpPr>
+          <p:nvPr/>
+        </p:nvCxnSpPr>
+        <p:spPr>
+          <a:xfrm>
+            <a:off x="7692652" y="4093802"/>
+            <a:ext cx="881670" cy="927882"/>
+          </a:xfrm>
+          <a:prstGeom prst="straightConnector1">
+            <a:avLst/>
+          </a:prstGeom>
+          <a:ln>
+            <a:tailEnd type="triangle"/>
+          </a:ln>
+        </p:spPr>
+        <p:style>
+          <a:lnRef idx="2">
+            <a:schemeClr val="accent1"/>
+          </a:lnRef>
+          <a:fillRef idx="0">
+            <a:schemeClr val="accent1"/>
+          </a:fillRef>
+          <a:effectRef idx="1">
+            <a:schemeClr val="accent1"/>
+          </a:effectRef>
+          <a:fontRef idx="minor">
+            <a:schemeClr val="tx1"/>
+          </a:fontRef>
+        </p:style>
+      </p:cxnSp>
+      <p:cxnSp>
+        <p:nvCxnSpPr>
+          <p:cNvPr id="51" name="Connecteur droit avec flèche 50">
+            <a:extLst>
+              <a:ext uri="{FF2B5EF4-FFF2-40B4-BE49-F238E27FC236}">
+                <a16:creationId xmlns:a16="http://schemas.microsoft.com/office/drawing/2014/main" id="{4347B41C-D9B5-8592-957D-643A87D93228}"/>
+              </a:ext>
+            </a:extLst>
+          </p:cNvPr>
+          <p:cNvCxnSpPr>
+            <a:cxnSpLocks/>
+          </p:cNvCxnSpPr>
+          <p:nvPr/>
+        </p:nvCxnSpPr>
+        <p:spPr>
+          <a:xfrm flipV="1">
+            <a:off x="7436880" y="2034513"/>
+            <a:ext cx="805500" cy="617450"/>
+          </a:xfrm>
+          <a:prstGeom prst="straightConnector1">
+            <a:avLst/>
+          </a:prstGeom>
+          <a:ln>
+            <a:tailEnd type="triangle"/>
+          </a:ln>
+        </p:spPr>
+        <p:style>
+          <a:lnRef idx="2">
+            <a:schemeClr val="accent1"/>
+          </a:lnRef>
+          <a:fillRef idx="0">
+            <a:schemeClr val="accent1"/>
+          </a:fillRef>
+          <a:effectRef idx="1">
+            <a:schemeClr val="accent1"/>
+          </a:effectRef>
+          <a:fontRef idx="minor">
+            <a:schemeClr val="tx1"/>
+          </a:fontRef>
+        </p:style>
+      </p:cxnSp>
+      <p:sp>
+        <p:nvSpPr>
+          <p:cNvPr id="54" name="ZoneTexte 53">
+            <a:extLst>
+              <a:ext uri="{FF2B5EF4-FFF2-40B4-BE49-F238E27FC236}">
+                <a16:creationId xmlns:a16="http://schemas.microsoft.com/office/drawing/2014/main" id="{0A6CA2BD-D2AC-D0E8-B396-ED646079321C}"/>
+              </a:ext>
+            </a:extLst>
+          </p:cNvPr>
+          <p:cNvSpPr txBox="1"/>
+          <p:nvPr/>
+        </p:nvSpPr>
+        <p:spPr>
+          <a:xfrm>
+            <a:off x="7436880" y="927462"/>
+            <a:ext cx="2446235" cy="430887"/>
+          </a:xfrm>
+          <a:prstGeom prst="rect">
+            <a:avLst/>
+          </a:prstGeom>
+          <a:noFill/>
+        </p:spPr>
+        <p:txBody>
+          <a:bodyPr wrap="square" rtlCol="0">
+            <a:spAutoFit/>
+          </a:bodyPr>
+          <a:lstStyle/>
+          <a:p>
+            <a:r>
+              <a:rPr lang="fr-FR" sz="1100" b="1" i="1" dirty="0"/>
+              <a:t>Mesure de l’ambiance du chat</a:t>
+            </a:r>
+          </a:p>
+          <a:p>
+            <a:r>
+              <a:rPr lang="fr-FR" sz="1100" b="1" i="1" dirty="0"/>
+              <a:t>en temps réel</a:t>
+            </a:r>
+          </a:p>
+        </p:txBody>
+      </p:sp>
+      <p:cxnSp>
+        <p:nvCxnSpPr>
+          <p:cNvPr id="56" name="Connecteur droit avec flèche 55">
+            <a:extLst>
+              <a:ext uri="{FF2B5EF4-FFF2-40B4-BE49-F238E27FC236}">
+                <a16:creationId xmlns:a16="http://schemas.microsoft.com/office/drawing/2014/main" id="{EBE70E25-0E2B-9BF8-C077-AB5FE7441AF2}"/>
+              </a:ext>
+            </a:extLst>
+          </p:cNvPr>
+          <p:cNvCxnSpPr>
+            <a:cxnSpLocks/>
+          </p:cNvCxnSpPr>
+          <p:nvPr/>
+        </p:nvCxnSpPr>
+        <p:spPr>
+          <a:xfrm>
+            <a:off x="8869687" y="2305713"/>
+            <a:ext cx="277280" cy="2693620"/>
+          </a:xfrm>
+          <a:prstGeom prst="straightConnector1">
+            <a:avLst/>
+          </a:prstGeom>
+          <a:ln>
+            <a:tailEnd type="triangle"/>
+          </a:ln>
+        </p:spPr>
+        <p:style>
+          <a:lnRef idx="2">
+            <a:schemeClr val="accent1"/>
+          </a:lnRef>
+          <a:fillRef idx="0">
+            <a:schemeClr val="accent1"/>
+          </a:fillRef>
+          <a:effectRef idx="1">
+            <a:schemeClr val="accent1"/>
+          </a:effectRef>
+          <a:fontRef idx="minor">
+            <a:schemeClr val="tx1"/>
+          </a:fontRef>
+        </p:style>
+      </p:cxnSp>
+      <p:sp>
+        <p:nvSpPr>
+          <p:cNvPr id="62" name="ZoneTexte 61">
+            <a:extLst>
+              <a:ext uri="{FF2B5EF4-FFF2-40B4-BE49-F238E27FC236}">
+                <a16:creationId xmlns:a16="http://schemas.microsoft.com/office/drawing/2014/main" id="{B4A9F40D-20FB-6925-5AED-006033B9120C}"/>
+              </a:ext>
+            </a:extLst>
+          </p:cNvPr>
+          <p:cNvSpPr txBox="1"/>
+          <p:nvPr/>
+        </p:nvSpPr>
+        <p:spPr>
+          <a:xfrm>
+            <a:off x="10309647" y="1311567"/>
+            <a:ext cx="2446235" cy="600164"/>
+          </a:xfrm>
+          <a:prstGeom prst="rect">
+            <a:avLst/>
+          </a:prstGeom>
+          <a:noFill/>
+        </p:spPr>
+        <p:txBody>
+          <a:bodyPr wrap="square" rtlCol="0">
+            <a:spAutoFit/>
+          </a:bodyPr>
+          <a:lstStyle/>
+          <a:p>
+            <a:r>
+              <a:rPr lang="fr-FR" sz="1100" b="1" i="1" dirty="0"/>
+              <a:t>Dashboard  </a:t>
+            </a:r>
+            <a:br>
+              <a:rPr lang="fr-FR" sz="1100" b="1" i="1" dirty="0"/>
+            </a:br>
+            <a:r>
+              <a:rPr lang="fr-FR" sz="1100" b="1" i="1" dirty="0"/>
+              <a:t>Ambiance, nb </a:t>
+            </a:r>
+            <a:r>
+              <a:rPr lang="fr-FR" sz="1100" b="1" i="1" dirty="0" err="1"/>
+              <a:t>viewers</a:t>
+            </a:r>
+            <a:r>
+              <a:rPr lang="fr-FR" sz="1100" b="1" i="1" dirty="0"/>
+              <a:t>, nb messages par min. …</a:t>
+            </a:r>
+          </a:p>
+        </p:txBody>
+      </p:sp>
+      <p:cxnSp>
+        <p:nvCxnSpPr>
+          <p:cNvPr id="1035" name="Connecteur droit avec flèche 1034">
+            <a:extLst>
+              <a:ext uri="{FF2B5EF4-FFF2-40B4-BE49-F238E27FC236}">
+                <a16:creationId xmlns:a16="http://schemas.microsoft.com/office/drawing/2014/main" id="{4BD791E0-0573-1889-A90B-FD2AA2FA7074}"/>
+              </a:ext>
+            </a:extLst>
+          </p:cNvPr>
+          <p:cNvCxnSpPr>
+            <a:cxnSpLocks/>
+          </p:cNvCxnSpPr>
+          <p:nvPr/>
+        </p:nvCxnSpPr>
+        <p:spPr>
+          <a:xfrm flipV="1">
+            <a:off x="10000725" y="3050140"/>
+            <a:ext cx="793073" cy="1761288"/>
+          </a:xfrm>
+          <a:prstGeom prst="straightConnector1">
+            <a:avLst/>
+          </a:prstGeom>
+          <a:ln>
+            <a:tailEnd type="triangle"/>
+          </a:ln>
+        </p:spPr>
+        <p:style>
+          <a:lnRef idx="2">
+            <a:schemeClr val="accent1"/>
+          </a:lnRef>
+          <a:fillRef idx="0">
+            <a:schemeClr val="accent1"/>
+          </a:fillRef>
+          <a:effectRef idx="1">
+            <a:schemeClr val="accent1"/>
+          </a:effectRef>
+          <a:fontRef idx="minor">
+            <a:schemeClr val="tx1"/>
+          </a:fontRef>
+        </p:style>
+      </p:cxnSp>
+      <p:pic>
+        <p:nvPicPr>
+          <p:cNvPr id="2" name="Picture 2" descr="Understanding Reputation Management Through Sentiment Analysis">
+            <a:extLst>
+              <a:ext uri="{FF2B5EF4-FFF2-40B4-BE49-F238E27FC236}">
+                <a16:creationId xmlns:a16="http://schemas.microsoft.com/office/drawing/2014/main" id="{2C7AF4F5-E930-B522-5B49-B99AEC09421E}"/>
+              </a:ext>
+            </a:extLst>
+          </p:cNvPr>
+          <p:cNvPicPr>
+            <a:picLocks noChangeAspect="1" noChangeArrowheads="1"/>
+          </p:cNvPicPr>
+          <p:nvPr/>
+        </p:nvPicPr>
+        <p:blipFill>
+          <a:blip r:embed="rId11">
+            <a:extLst>
+              <a:ext uri="{28A0092B-C50C-407E-A947-70E740481C1C}">
+                <a14:useLocalDpi xmlns:a14="http://schemas.microsoft.com/office/drawing/2010/main" val="0"/>
+              </a:ext>
+            </a:extLst>
+          </a:blip>
+          <a:srcRect/>
+          <a:stretch>
+            <a:fillRect/>
+          </a:stretch>
+        </p:blipFill>
+        <p:spPr bwMode="auto">
+          <a:xfrm>
+            <a:off x="2645874" y="4250665"/>
+            <a:ext cx="2213348" cy="1159241"/>
+          </a:xfrm>
+          <a:prstGeom prst="rect">
+            <a:avLst/>
+          </a:prstGeom>
+          <a:noFill/>
+          <a:extLst>
+            <a:ext uri="{909E8E84-426E-40DD-AFC4-6F175D3DCCD1}">
+              <a14:hiddenFill xmlns:a14="http://schemas.microsoft.com/office/drawing/2010/main">
+                <a:solidFill>
+                  <a:srgbClr val="FFFFFF"/>
+                </a:solidFill>
+              </a14:hiddenFill>
+            </a:ext>
+          </a:extLst>
+        </p:spPr>
+      </p:pic>
+      <p:pic>
+        <p:nvPicPr>
+          <p:cNvPr id="3" name="Picture 4" descr="Images de Pouce Vert Rouge – Téléchargement gratuit sur Freepik">
+            <a:extLst>
+              <a:ext uri="{FF2B5EF4-FFF2-40B4-BE49-F238E27FC236}">
+                <a16:creationId xmlns:a16="http://schemas.microsoft.com/office/drawing/2014/main" id="{901C73DE-B165-ABC6-C415-BB5798B83387}"/>
+              </a:ext>
+            </a:extLst>
+          </p:cNvPr>
+          <p:cNvPicPr>
+            <a:picLocks noChangeAspect="1" noChangeArrowheads="1"/>
+          </p:cNvPicPr>
+          <p:nvPr/>
+        </p:nvPicPr>
+        <p:blipFill>
+          <a:blip r:embed="rId12">
+            <a:extLst>
+              <a:ext uri="{28A0092B-C50C-407E-A947-70E740481C1C}">
+                <a14:useLocalDpi xmlns:a14="http://schemas.microsoft.com/office/drawing/2010/main" val="0"/>
+              </a:ext>
+            </a:extLst>
+          </a:blip>
+          <a:srcRect/>
+          <a:stretch>
+            <a:fillRect/>
+          </a:stretch>
+        </p:blipFill>
+        <p:spPr bwMode="auto">
+          <a:xfrm>
+            <a:off x="8332997" y="1413065"/>
+            <a:ext cx="1401358" cy="840815"/>
+          </a:xfrm>
+          <a:prstGeom prst="rect">
+            <a:avLst/>
+          </a:prstGeom>
+          <a:noFill/>
+          <a:extLst>
+            <a:ext uri="{909E8E84-426E-40DD-AFC4-6F175D3DCCD1}">
+              <a14:hiddenFill xmlns:a14="http://schemas.microsoft.com/office/drawing/2010/main">
+                <a:solidFill>
+                  <a:srgbClr val="FFFFFF"/>
+                </a:solidFill>
+              </a14:hiddenFill>
+            </a:ext>
+          </a:extLst>
+        </p:spPr>
+      </p:pic>
+    </p:spTree>
+    <p:extLst>
+      <p:ext uri="{BB962C8B-B14F-4D97-AF65-F5344CB8AC3E}">
+        <p14:creationId xmlns:p14="http://schemas.microsoft.com/office/powerpoint/2010/main" val="1204038913"/>
       </p:ext>
     </p:extLst>
   </p:cSld>
